--- a/docs/content/two_way_anova/two_way_anova_lecture.pptx
+++ b/docs/content/two_way_anova/two_way_anova_lecture.pptx
@@ -55,6 +55,8 @@
     <p:sldId id="303" r:id="rId49"/>
     <p:sldId id="304" r:id="rId50"/>
     <p:sldId id="305" r:id="rId51"/>
+    <p:sldId id="306" r:id="rId52"/>
+    <p:sldId id="307" r:id="rId53"/>
   </p:sldIdLst>
   <p:sldSz cx="9144000" cy="5143500" type="screen16x9"/>
   <p:notesSz cx="6858000" cy="9144000"/>
@@ -3475,7 +3477,7 @@
       </p:sp>
       <p:pic>
         <p:nvPicPr>
-          <p:cNvPr descr="two_way_anova_lecture_files/figure-pptx/unnamed-chunk-6-1.png" id="0" name="Picture 1"/>
+          <p:cNvPr descr="two_way_anova_lecture_files/figure-pptx/two-way-anova-06-1.png" id="0" name="Picture 1"/>
           <p:cNvPicPr>
             <a:picLocks noGrp="1" noChangeAspect="1"/>
           </p:cNvPicPr>
@@ -8378,37 +8380,315 @@
           </a:p>
         </p:txBody>
       </p:sp>
-      <p:sp>
-        <p:nvSpPr>
-          <p:cNvPr id="4" name="Content Placeholder 3"/>
-          <p:cNvSpPr>
-            <a:spLocks noGrp="1"/>
-          </p:cNvSpPr>
-          <p:nvPr>
-            <p:ph idx="2" sz="half"/>
-          </p:nvPr>
-        </p:nvSpPr>
-        <p:spPr/>
-        <p:txBody>
-          <a:bodyPr/>
-          <a:lstStyle/>
-          <a:p>
-            <a:pPr lvl="0" indent="0">
-              <a:buNone/>
-            </a:pPr>
-            <a:r>
-              <a:rPr>
-                <a:latin typeface="Courier"/>
-              </a:rPr>
-              <a:t>## Effect Sizes (Eta-squared):
-##        Effect Eta_Squared
-## 1     Species  0.67696748
-## 2         Sex  0.16968160
-## 3 Interaction  0.01290854</a:t>
-            </a:r>
-          </a:p>
-        </p:txBody>
-      </p:sp>
+      <mc:AlternateContent xmlns:mc="http://schemas.openxmlformats.org/markup-compatibility/2006">
+        <mc:Choice xmlns:a14="http://schemas.microsoft.com/office/drawing/2010/main" Requires="a14">
+          <p:sp>
+            <p:nvSpPr>
+              <p:cNvPr id="4" name="Content Placeholder 3"/>
+              <p:cNvSpPr>
+                <a:spLocks noGrp="1"/>
+              </p:cNvSpPr>
+              <p:nvPr>
+                <p:ph idx="2" sz="half"/>
+              </p:nvPr>
+            </p:nvSpPr>
+            <p:spPr/>
+            <p:txBody>
+              <a:bodyPr/>
+              <a:lstStyle/>
+              <a:p>
+                <a:pPr lvl="0" indent="0">
+                  <a:buNone/>
+                </a:pPr>
+                <a:r>
+                  <a:rPr>
+                    <a:latin typeface="Courier"/>
+                  </a:rPr>
+                  <a:t>## Effect Sizes (partial eta-squared):
+##        Effect Partial_Eta_Sq
+## 1     Species         0.8282
+## 2         Sex         0.5471
+## 3 Interaction         0.0842</a:t>
+                </a:r>
+              </a:p>
+              <a:p>
+                <a:pPr lvl="0" indent="0" marL="1270000">
+                  <a:buNone/>
+                </a:pPr>
+                <a:r>
+                  <a:rPr sz="2000" b="1"/>
+                  <a:t>Note</a:t>
+                </a:r>
+              </a:p>
+              <a:p>
+                <a:pPr lvl="0" indent="0" marL="1270000">
+                  <a:buNone/>
+                </a:pPr>
+                <a:r>
+                  <a:rPr sz="2000" b="1"/>
+                  <a:t>📖 Which effect size, and why</a:t>
+                </a:r>
+              </a:p>
+              <a:p>
+                <a:pPr lvl="0" indent="0" marL="1270000">
+                  <a:buNone/>
+                </a:pPr>
+                <a14:m>
+                  <m:oMathPara xmlns:m="http://schemas.openxmlformats.org/officeDocument/2006/math">
+                    <m:oMathParaPr>
+                      <m:jc m:val="center"/>
+                    </m:oMathParaPr>
+                    <m:oMath>
+                      <m:sSubSup>
+                        <m:e>
+                          <m:r>
+                            <m:t>η</m:t>
+                          </m:r>
+                        </m:e>
+                        <m:sub>
+                          <m:r>
+                            <m:t>p</m:t>
+                          </m:r>
+                        </m:sub>
+                        <m:sup>
+                          <m:r>
+                            <m:t>2</m:t>
+                          </m:r>
+                        </m:sup>
+                      </m:sSubSup>
+                      <m:r>
+                        <m:rPr>
+                          <m:sty m:val="p"/>
+                        </m:rPr>
+                        <m:t>=</m:t>
+                      </m:r>
+                      <m:f>
+                        <m:fPr>
+                          <m:type m:val="bar"/>
+                        </m:fPr>
+                        <m:num>
+                          <m:r>
+                            <m:t>S</m:t>
+                          </m:r>
+                          <m:sSub>
+                            <m:e>
+                              <m:r>
+                                <m:t>S</m:t>
+                              </m:r>
+                            </m:e>
+                            <m:sub>
+                              <m:r>
+                                <m:t>e</m:t>
+                              </m:r>
+                              <m:r>
+                                <m:t>f</m:t>
+                              </m:r>
+                              <m:r>
+                                <m:t>f</m:t>
+                              </m:r>
+                              <m:r>
+                                <m:t>e</m:t>
+                              </m:r>
+                              <m:r>
+                                <m:t>c</m:t>
+                              </m:r>
+                              <m:r>
+                                <m:t>t</m:t>
+                              </m:r>
+                            </m:sub>
+                          </m:sSub>
+                        </m:num>
+                        <m:den>
+                          <m:r>
+                            <m:t>S</m:t>
+                          </m:r>
+                          <m:sSub>
+                            <m:e>
+                              <m:r>
+                                <m:t>S</m:t>
+                              </m:r>
+                            </m:e>
+                            <m:sub>
+                              <m:r>
+                                <m:t>e</m:t>
+                              </m:r>
+                              <m:r>
+                                <m:t>f</m:t>
+                              </m:r>
+                              <m:r>
+                                <m:t>f</m:t>
+                              </m:r>
+                              <m:r>
+                                <m:t>e</m:t>
+                              </m:r>
+                              <m:r>
+                                <m:t>c</m:t>
+                              </m:r>
+                              <m:r>
+                                <m:t>t</m:t>
+                              </m:r>
+                            </m:sub>
+                          </m:sSub>
+                          <m:r>
+                            <m:rPr>
+                              <m:sty m:val="p"/>
+                            </m:rPr>
+                            <m:t>+</m:t>
+                          </m:r>
+                          <m:r>
+                            <m:t>S</m:t>
+                          </m:r>
+                          <m:sSub>
+                            <m:e>
+                              <m:r>
+                                <m:t>S</m:t>
+                              </m:r>
+                            </m:e>
+                            <m:sub>
+                              <m:r>
+                                <m:t>r</m:t>
+                              </m:r>
+                              <m:r>
+                                <m:t>e</m:t>
+                              </m:r>
+                              <m:r>
+                                <m:t>s</m:t>
+                              </m:r>
+                              <m:r>
+                                <m:t>i</m:t>
+                              </m:r>
+                              <m:r>
+                                <m:t>d</m:t>
+                              </m:r>
+                              <m:r>
+                                <m:t>u</m:t>
+                              </m:r>
+                              <m:r>
+                                <m:t>a</m:t>
+                              </m:r>
+                              <m:r>
+                                <m:t>l</m:t>
+                              </m:r>
+                            </m:sub>
+                          </m:sSub>
+                        </m:den>
+                      </m:f>
+                    </m:oMath>
+                  </m:oMathPara>
+                </a14:m>
+              </a:p>
+              <a:p>
+                <a:pPr lvl="0" indent="0" marL="1270000">
+                  <a:buNone/>
+                </a:pPr>
+                <a:r>
+                  <a:rPr sz="2000" b="1"/>
+                  <a:t>Partial</a:t>
+                </a:r>
+                <a:r>
+                  <a:rPr sz="2000"/>
+                  <a:t> η² asks “of the variation this effect </a:t>
+                </a:r>
+                <a:r>
+                  <a:rPr sz="2000" i="1"/>
+                  <a:t>could</a:t>
+                </a:r>
+                <a:r>
+                  <a:rPr sz="2000"/>
+                  <a:t> explain, how much does it?” Plain η² divides by </a:t>
+                </a:r>
+                <a14:m>
+                  <m:oMath xmlns:m="http://schemas.openxmlformats.org/officeDocument/2006/math">
+                    <m:r>
+                      <m:t>S</m:t>
+                    </m:r>
+                    <m:sSub>
+                      <m:e>
+                        <m:r>
+                          <m:t>S</m:t>
+                        </m:r>
+                      </m:e>
+                      <m:sub>
+                        <m:r>
+                          <m:t>t</m:t>
+                        </m:r>
+                        <m:r>
+                          <m:t>o</m:t>
+                        </m:r>
+                        <m:r>
+                          <m:t>t</m:t>
+                        </m:r>
+                        <m:r>
+                          <m:t>a</m:t>
+                        </m:r>
+                        <m:r>
+                          <m:t>l</m:t>
+                        </m:r>
+                      </m:sub>
+                    </m:sSub>
+                  </m:oMath>
+                </a14:m>
+                <a:r>
+                  <a:rPr sz="2000"/>
+                  <a:t> instead.</a:t>
+                </a:r>
+              </a:p>
+              <a:p>
+                <a:pPr lvl="0" indent="0" marL="1270000">
+                  <a:buNone/>
+                </a:pPr>
+                <a:r>
+                  <a:rPr sz="2000"/>
+                  <a:t>They agree only when a design is balanced. </a:t>
+                </a:r>
+                <a:r>
+                  <a:rPr sz="2000" b="1"/>
+                  <a:t>Type III sums of squares do not add up to </a:t>
+                </a:r>
+                <a14:m>
+                  <m:oMath xmlns:m="http://schemas.openxmlformats.org/officeDocument/2006/math">
+                    <m:r>
+                      <m:t>S</m:t>
+                    </m:r>
+                    <m:sSub>
+                      <m:e>
+                        <m:r>
+                          <m:t>S</m:t>
+                        </m:r>
+                      </m:e>
+                      <m:sub>
+                        <m:r>
+                          <m:t>t</m:t>
+                        </m:r>
+                        <m:r>
+                          <m:t>o</m:t>
+                        </m:r>
+                        <m:r>
+                          <m:t>t</m:t>
+                        </m:r>
+                        <m:r>
+                          <m:t>a</m:t>
+                        </m:r>
+                        <m:r>
+                          <m:t>l</m:t>
+                        </m:r>
+                      </m:sub>
+                    </m:sSub>
+                  </m:oMath>
+                </a14:m>
+                <a:r>
+                  <a:rPr sz="2000" b="1"/>
+                  <a:t> in an unbalanced design</a:t>
+                </a:r>
+                <a:r>
+                  <a:rPr sz="2000"/>
+                  <a:t> — so dividing by their sum gives a number that is neither η² nor η²ₚ. Partial η² is well defined either way, which is why we use it throughout this lecture.</a:t>
+                </a:r>
+              </a:p>
+            </p:txBody>
+          </p:sp>
+        </mc:Choice>
+      </mc:AlternateContent>
     </p:spTree>
   </p:cSld>
 </p:sld>
@@ -9060,7 +9340,7 @@
       </p:sp>
       <p:pic>
         <p:nvPicPr>
-          <p:cNvPr descr="two_way_anova_lecture_files/figure-pptx/unnamed-chunk-20-1.png" id="0" name="Picture 1"/>
+          <p:cNvPr descr="two_way_anova_lecture_files/figure-pptx/two-way-anova-20-1.png" id="0" name="Picture 1"/>
           <p:cNvPicPr>
             <a:picLocks noGrp="1" noChangeAspect="1"/>
           </p:cNvPicPr>
@@ -9405,7 +9685,7 @@
       </mc:AlternateContent>
       <p:pic>
         <p:nvPicPr>
-          <p:cNvPr descr="two_way_anova_lecture_files/figure-pptx/unnamed-chunk-22-1.png" id="0" name="Picture 1"/>
+          <p:cNvPr descr="two_way_anova_lecture_files/figure-pptx/two-way-anova-22-1.png" id="0" name="Picture 1"/>
           <p:cNvPicPr>
             <a:picLocks noGrp="1" noChangeAspect="1"/>
           </p:cNvPicPr>
@@ -10047,11 +10327,11 @@
               <a:rPr>
                 <a:latin typeface="Courier"/>
               </a:rPr>
-              <a:t>## [1] "Effect Sizes (Type III):"
-##        Effect Eta_Squared
-## 1     Species      0.6947
-## 2         Sex      0.1450
-## 3 Interaction      0.0081</a:t>
+              <a:t>## [1] "Effect Sizes (partial eta-squared, Type III):"
+##        Effect Partial_Eta_Sq
+## 1     Species         0.8204
+## 2         Sex         0.4881
+## 3 Interaction         0.0508</a:t>
             </a:r>
           </a:p>
         </p:txBody>
@@ -10165,14 +10445,12 @@
                 <a:latin typeface="Courier"/>
               </a:rPr>
               <a:t>## SS(Species alone): 145190219
-## SS(Sex alone): 38878897
-## 
+## SS(Sex alone):     38878897
 ## 
 ## Sum of main effects: 184069116
-## Actual between SS: 183957038
+## Actual between SS:   183957038
 ## 
-## 
-## Difference (due to correlation): -112078</a:t>
+## Difference (design is not orthogonal): -112078</a:t>
             </a:r>
           </a:p>
           <a:p>
@@ -10538,7 +10816,7 @@
               <a:rPr>
                 <a:latin typeface="Courier"/>
               </a:rPr>
-              <a:t>## Sex effect (Male - Female) by species:
+              <a:t>## Sex effect (female - male, grams) by species:
 ##     Species Sex_Effect
 ## 1    Adelie       -675
 ## 2 Chinstrap       -412
@@ -10608,7 +10886,7 @@
       </p:sp>
       <p:pic>
         <p:nvPicPr>
-          <p:cNvPr descr="two_way_anova_lecture_files/figure-pptx/unnamed-chunk-32-1.png" id="0" name="Picture 1"/>
+          <p:cNvPr descr="two_way_anova_lecture_files/figure-pptx/two-way-anova-32-1.png" id="0" name="Picture 1"/>
           <p:cNvPicPr>
             <a:picLocks noGrp="1" noChangeAspect="1"/>
           </p:cNvPicPr>
@@ -10829,7 +11107,7 @@
       </p:sp>
       <p:pic>
         <p:nvPicPr>
-          <p:cNvPr descr="two_way_anova_lecture_files/figure-pptx/unnamed-chunk-35-1.png" id="0" name="Picture 1"/>
+          <p:cNvPr descr="two_way_anova_lecture_files/figure-pptx/two-way-anova-35-1.png" id="0" name="Picture 1"/>
           <p:cNvPicPr>
             <a:picLocks noGrp="1" noChangeAspect="1"/>
           </p:cNvPicPr>
@@ -11439,6 +11717,563 @@
             <a:r>
               <a:rPr sz="2000"/>
               <a:t>Always specify which type you’re using!</a:t>
+            </a:r>
+          </a:p>
+        </p:txBody>
+      </p:sp>
+    </p:spTree>
+  </p:cSld>
+</p:sld>
+</file>
+
+<file path=ppt/slides/slide51.xml><?xml version="1.0" encoding="utf-8"?>
+<p:sld xmlns:a="http://schemas.openxmlformats.org/drawingml/2006/main" xmlns:r="http://schemas.openxmlformats.org/officeDocument/2006/relationships" xmlns:p="http://schemas.openxmlformats.org/presentationml/2006/main">
+  <p:cSld>
+    <p:spTree>
+      <p:nvGrpSpPr>
+        <p:cNvPr id="1" name=""/>
+        <p:cNvGrpSpPr/>
+        <p:nvPr/>
+      </p:nvGrpSpPr>
+      <p:grpSpPr>
+        <a:xfrm>
+          <a:off x="0" y="0"/>
+          <a:ext cx="0" cy="0"/>
+          <a:chOff x="0" y="0"/>
+          <a:chExt cx="0" cy="0"/>
+        </a:xfrm>
+      </p:grpSpPr>
+      <p:sp>
+        <p:nvSpPr>
+          <p:cNvPr id="2" name="Title 1"/>
+          <p:cNvSpPr>
+            <a:spLocks noGrp="1"/>
+          </p:cNvSpPr>
+          <p:nvPr>
+            <p:ph type="title"/>
+          </p:nvPr>
+        </p:nvSpPr>
+        <p:spPr>
+          <a:xfrm>
+            <a:off x="0" y="0"/>
+            <a:ext cx="9144000" cy="602780"/>
+          </a:xfrm>
+          <a:solidFill>
+            <a:srgbClr val="70121D"/>
+          </a:solidFill>
+        </p:spPr>
+        <p:txBody>
+          <a:bodyPr/>
+          <a:lstStyle/>
+          <a:p>
+            <a:pPr lvl="0" indent="0" marL="0">
+              <a:buNone/>
+            </a:pPr>
+            <a:r>
+              <a:rPr/>
+              <a:t>Wrap-up</a:t>
+            </a:r>
+          </a:p>
+        </p:txBody>
+      </p:sp>
+      <p:sp>
+        <p:nvSpPr>
+          <p:cNvPr id="3" name="Content Placeholder 2"/>
+          <p:cNvSpPr>
+            <a:spLocks noGrp="1"/>
+          </p:cNvSpPr>
+          <p:nvPr>
+            <p:ph idx="1" sz="half"/>
+          </p:nvPr>
+        </p:nvSpPr>
+        <p:spPr/>
+        <p:txBody>
+          <a:bodyPr/>
+          <a:lstStyle/>
+          <a:p>
+            <a:pPr lvl="0" indent="0" marL="0">
+              <a:buNone/>
+            </a:pPr>
+            <a:r>
+              <a:rPr/>
+              <a:t>Today you:</a:t>
+            </a:r>
+          </a:p>
+          <a:p>
+            <a:pPr lvl="0"/>
+            <a:r>
+              <a:rPr/>
+              <a:t>Fitted a </a:t>
+            </a:r>
+            <a:r>
+              <a:rPr b="1"/>
+              <a:t>factorial</a:t>
+            </a:r>
+            <a:r>
+              <a:rPr/>
+              <a:t> model with two categorical predictors — </a:t>
+            </a:r>
+            <a:r>
+              <a:rPr>
+                <a:latin typeface="Courier"/>
+              </a:rPr>
+              <a:t>body_mass_g ~ species * sex</a:t>
+            </a:r>
+          </a:p>
+          <a:p>
+            <a:pPr lvl="0"/>
+            <a:r>
+              <a:rPr/>
+              <a:t>Separated </a:t>
+            </a:r>
+            <a:r>
+              <a:rPr b="1"/>
+              <a:t>main effects</a:t>
+            </a:r>
+            <a:r>
+              <a:rPr/>
+              <a:t> from the </a:t>
+            </a:r>
+            <a:r>
+              <a:rPr b="1"/>
+              <a:t>interaction</a:t>
+            </a:r>
+            <a:r>
+              <a:rPr/>
+              <a:t>, and saw that an interaction means “the effect of one factor depends on the level of the other”</a:t>
+            </a:r>
+          </a:p>
+          <a:p>
+            <a:pPr lvl="0"/>
+            <a:r>
+              <a:rPr/>
+              <a:t>Used </a:t>
+            </a:r>
+            <a:r>
+              <a:rPr b="1"/>
+              <a:t>estimated marginal means</a:t>
+            </a:r>
+            <a:r>
+              <a:rPr/>
+              <a:t> instead of raw group averages, because with unequal cell sizes those are not the same thing</a:t>
+            </a:r>
+          </a:p>
+          <a:p>
+            <a:pPr lvl="0"/>
+            <a:r>
+              <a:rPr/>
+              <a:t>Met </a:t>
+            </a:r>
+            <a:r>
+              <a:rPr b="1"/>
+              <a:t>Type I, II and III sums of squares</a:t>
+            </a:r>
+            <a:r>
+              <a:rPr/>
+              <a:t>, and saw them give identical answers on a balanced design and different answers on an unbalanced one</a:t>
+            </a:r>
+          </a:p>
+          <a:p>
+            <a:pPr lvl="0"/>
+            <a:r>
+              <a:rPr/>
+              <a:t>Set </a:t>
+            </a:r>
+            <a:r>
+              <a:rPr>
+                <a:latin typeface="Courier"/>
+              </a:rPr>
+              <a:t>contr.sum</a:t>
+            </a:r>
+            <a:r>
+              <a:rPr/>
+              <a:t> contrasts </a:t>
+            </a:r>
+            <a:r>
+              <a:rPr b="1"/>
+              <a:t>before</a:t>
+            </a:r>
+            <a:r>
+              <a:rPr/>
+              <a:t> asking for Type III — without that step R silently returns the wrong main-effect tests</a:t>
+            </a:r>
+          </a:p>
+          <a:p>
+            <a:pPr lvl="0"/>
+            <a:r>
+              <a:rPr/>
+              <a:t>Reported </a:t>
+            </a:r>
+            <a:r>
+              <a:rPr b="1"/>
+              <a:t>partial η²</a:t>
+            </a:r>
+            <a:r>
+              <a:rPr/>
+              <a:t> as the effect size that stays well defined either way</a:t>
+            </a:r>
+          </a:p>
+          <a:p>
+            <a:pPr lvl="0" indent="0" marL="1270000">
+              <a:buNone/>
+            </a:pPr>
+            <a:r>
+              <a:rPr sz="2000" b="1"/>
+              <a:t>Important</a:t>
+            </a:r>
+          </a:p>
+          <a:p>
+            <a:pPr lvl="0" indent="0" marL="1270000">
+              <a:buNone/>
+            </a:pPr>
+            <a:r>
+              <a:rPr sz="2000" b="1"/>
+              <a:t>⚠️ Read the interaction first</a:t>
+            </a:r>
+          </a:p>
+          <a:p>
+            <a:pPr lvl="0" indent="0" marL="1270000">
+              <a:buNone/>
+            </a:pPr>
+            <a:r>
+              <a:rPr sz="2000"/>
+              <a:t>If the interaction is significant, a main effect is a </a:t>
+            </a:r>
+            <a:r>
+              <a:rPr sz="2000" i="1"/>
+              <a:t>average across conditions that behave differently</a:t>
+            </a:r>
+            <a:r>
+              <a:rPr sz="2000"/>
+              <a:t> — often not a meaningful quantity. Interpret the interaction, then use simple effects (</a:t>
+            </a:r>
+            <a:r>
+              <a:rPr sz="2000">
+                <a:latin typeface="Courier"/>
+              </a:rPr>
+              <a:t>emmeans(model, ~ sex | species)</a:t>
+            </a:r>
+            <a:r>
+              <a:rPr sz="2000"/>
+              <a:t>) rather than reporting the main effect as if it applied everywhere.</a:t>
+            </a:r>
+          </a:p>
+          <a:p>
+            <a:pPr lvl="0" indent="0" marL="1270000">
+              <a:buNone/>
+            </a:pPr>
+            <a:r>
+              <a:rPr sz="2000"/>
+              <a:t>R even warns you: </a:t>
+            </a:r>
+            <a:r>
+              <a:rPr sz="2000" i="1"/>
+              <a:t>“Results may be misleading due to involvement in interactions.”</a:t>
+            </a:r>
+          </a:p>
+        </p:txBody>
+      </p:sp>
+      <p:sp>
+        <p:nvSpPr>
+          <p:cNvPr id="4" name="Content Placeholder 3"/>
+          <p:cNvSpPr>
+            <a:spLocks noGrp="1"/>
+          </p:cNvSpPr>
+          <p:nvPr>
+            <p:ph idx="2" sz="half"/>
+          </p:nvPr>
+        </p:nvSpPr>
+        <p:spPr/>
+        <p:txBody>
+          <a:bodyPr/>
+          <a:lstStyle/>
+          <a:p>
+            <a:pPr lvl="0" indent="0" marL="1270000">
+              <a:buNone/>
+            </a:pPr>
+            <a:r>
+              <a:rPr sz="2000" b="1"/>
+              <a:t>Note</a:t>
+            </a:r>
+          </a:p>
+          <a:p>
+            <a:pPr lvl="0" indent="0" marL="1270000">
+              <a:buNone/>
+            </a:pPr>
+            <a:r>
+              <a:rPr sz="2000" b="1"/>
+              <a:t>✅ The one idea to keep</a:t>
+            </a:r>
+          </a:p>
+          <a:p>
+            <a:pPr lvl="0" indent="0" marL="1270000">
+              <a:buNone/>
+            </a:pPr>
+            <a:r>
+              <a:rPr sz="2000" b="1"/>
+              <a:t>Balance is a property of your design, not your analysis.</a:t>
+            </a:r>
+            <a:r>
+              <a:rPr sz="2000"/>
+              <a:t> A balanced design makes the two factors orthogonal, so each one’s sum of squares is unambiguous. Imbalance makes them share variance — and then </a:t>
+            </a:r>
+            <a:r>
+              <a:rPr sz="2000" i="1"/>
+              <a:t>how</a:t>
+            </a:r>
+            <a:r>
+              <a:rPr sz="2000"/>
+              <a:t> you allocate that shared variance (Type I vs III) becomes a decision you have to make and defend.</a:t>
+            </a:r>
+          </a:p>
+          <a:p>
+            <a:pPr lvl="0" indent="0" marL="1270000">
+              <a:buNone/>
+            </a:pPr>
+            <a:r>
+              <a:rPr sz="2000" b="1"/>
+              <a:t>Note</a:t>
+            </a:r>
+          </a:p>
+          <a:p>
+            <a:pPr lvl="0" indent="0" marL="1270000">
+              <a:buNone/>
+            </a:pPr>
+            <a:r>
+              <a:rPr sz="2000" b="1"/>
+              <a:t>Up next — Nested ANOVA</a:t>
+            </a:r>
+          </a:p>
+          <a:p>
+            <a:pPr lvl="0"/>
+            <a:r>
+              <a:rPr sz="2000"/>
+              <a:t>When one factor is nested inside another rather than crossed with it</a:t>
+            </a:r>
+          </a:p>
+          <a:p>
+            <a:pPr lvl="0"/>
+            <a:r>
+              <a:rPr sz="2000"/>
+              <a:t>Subsamples, and the right error term to test against</a:t>
+            </a:r>
+          </a:p>
+        </p:txBody>
+      </p:sp>
+    </p:spTree>
+  </p:cSld>
+</p:sld>
+</file>
+
+<file path=ppt/slides/slide52.xml><?xml version="1.0" encoding="utf-8"?>
+<p:sld xmlns:a="http://schemas.openxmlformats.org/drawingml/2006/main" xmlns:r="http://schemas.openxmlformats.org/officeDocument/2006/relationships" xmlns:p="http://schemas.openxmlformats.org/presentationml/2006/main">
+  <p:cSld>
+    <p:spTree>
+      <p:nvGrpSpPr>
+        <p:cNvPr id="1" name=""/>
+        <p:cNvGrpSpPr/>
+        <p:nvPr/>
+      </p:nvGrpSpPr>
+      <p:grpSpPr>
+        <a:xfrm>
+          <a:off x="0" y="0"/>
+          <a:ext cx="0" cy="0"/>
+          <a:chOff x="0" y="0"/>
+          <a:chExt cx="0" cy="0"/>
+        </a:xfrm>
+      </p:grpSpPr>
+      <p:sp>
+        <p:nvSpPr>
+          <p:cNvPr id="2" name="Title 1"/>
+          <p:cNvSpPr>
+            <a:spLocks noGrp="1"/>
+          </p:cNvSpPr>
+          <p:nvPr>
+            <p:ph type="title"/>
+          </p:nvPr>
+        </p:nvSpPr>
+        <p:spPr>
+          <a:xfrm>
+            <a:off x="0" y="0"/>
+            <a:ext cx="9144000" cy="582780"/>
+          </a:xfrm>
+        </p:spPr>
+        <p:txBody>
+          <a:bodyPr/>
+          <a:lstStyle/>
+          <a:p>
+            <a:pPr lvl="0" indent="0" marL="0">
+              <a:buNone/>
+            </a:pPr>
+            <a:r>
+              <a:rPr/>
+              <a:t>Getting unstuck</a:t>
+            </a:r>
+          </a:p>
+        </p:txBody>
+      </p:sp>
+      <p:sp>
+        <p:nvSpPr>
+          <p:cNvPr id="3" name="Content Placeholder 2"/>
+          <p:cNvSpPr>
+            <a:spLocks noGrp="1"/>
+          </p:cNvSpPr>
+          <p:nvPr>
+            <p:ph idx="1"/>
+          </p:nvPr>
+        </p:nvSpPr>
+        <p:spPr/>
+        <p:txBody>
+          <a:bodyPr/>
+          <a:lstStyle/>
+          <a:p>
+            <a:pPr lvl="0" indent="0" marL="0">
+              <a:buNone/>
+            </a:pPr>
+            <a:r>
+              <a:rPr/>
+              <a:t>When code breaks — and it will, that is normal:</a:t>
+            </a:r>
+          </a:p>
+          <a:p>
+            <a:pPr lvl="0" indent="-342900" marL="342900">
+              <a:buAutoNum type="arabicPeriod"/>
+            </a:pPr>
+            <a:r>
+              <a:rPr/>
+              <a:t>Read the </a:t>
+            </a:r>
+            <a:r>
+              <a:rPr b="1"/>
+              <a:t>error message</a:t>
+            </a:r>
+            <a:r>
+              <a:rPr/>
+              <a:t> out loud; it usually names the line</a:t>
+            </a:r>
+          </a:p>
+          <a:p>
+            <a:pPr lvl="0" indent="-342900" marL="342900">
+              <a:buAutoNum type="arabicPeriod"/>
+            </a:pPr>
+            <a:r>
+              <a:rPr/>
+              <a:t>Check the usual suspects: did you run </a:t>
+            </a:r>
+            <a:r>
+              <a:rPr>
+                <a:latin typeface="Courier"/>
+              </a:rPr>
+              <a:t>options(contrasts = c("contr.sum", "contr.poly"))</a:t>
+            </a:r>
+            <a:r>
+              <a:rPr/>
+              <a:t> </a:t>
+            </a:r>
+            <a:r>
+              <a:rPr b="1"/>
+              <a:t>before</a:t>
+            </a:r>
+            <a:r>
+              <a:rPr/>
+              <a:t> fitting the model you pass to </a:t>
+            </a:r>
+            <a:r>
+              <a:rPr>
+                <a:latin typeface="Courier"/>
+              </a:rPr>
+              <a:t>Anova(type = "III")</a:t>
+            </a:r>
+            <a:r>
+              <a:rPr/>
+              <a:t>? Are both predictors </a:t>
+            </a:r>
+            <a:r>
+              <a:rPr b="1"/>
+              <a:t>factors</a:t>
+            </a:r>
+            <a:r>
+              <a:rPr/>
+              <a:t>? Is it </a:t>
+            </a:r>
+            <a:r>
+              <a:rPr>
+                <a:latin typeface="Courier"/>
+              </a:rPr>
+              <a:t>car::Anova()</a:t>
+            </a:r>
+            <a:r>
+              <a:rPr/>
+              <a:t> (capital A, Type II/III) rather than </a:t>
+            </a:r>
+            <a:r>
+              <a:rPr>
+                <a:latin typeface="Courier"/>
+              </a:rPr>
+              <a:t>anova()</a:t>
+            </a:r>
+            <a:r>
+              <a:rPr/>
+              <a:t> (lower case, Type I)?</a:t>
+            </a:r>
+          </a:p>
+          <a:p>
+            <a:pPr lvl="0" indent="-342900" marL="342900">
+              <a:buAutoNum type="arabicPeriod"/>
+            </a:pPr>
+            <a:r>
+              <a:rPr>
+                <a:latin typeface="Courier"/>
+              </a:rPr>
+              <a:t>?function_name</a:t>
+            </a:r>
+            <a:r>
+              <a:rPr/>
+              <a:t> opens the help page</a:t>
+            </a:r>
+          </a:p>
+          <a:p>
+            <a:pPr lvl="0" indent="-342900" marL="342900">
+              <a:buAutoNum type="arabicPeriod"/>
+            </a:pPr>
+            <a:r>
+              <a:rPr/>
+              <a:t>Bring the </a:t>
+            </a:r>
+            <a:r>
+              <a:rPr b="1"/>
+              <a:t>exact error</a:t>
+            </a:r>
+            <a:r>
+              <a:rPr/>
+              <a:t> (copy-paste it) to class or office hours</a:t>
+            </a:r>
+          </a:p>
+          <a:p>
+            <a:pPr lvl="0" indent="0" marL="1270000">
+              <a:buNone/>
+            </a:pPr>
+            <a:r>
+              <a:rPr sz="2000" b="1"/>
+              <a:t>Note</a:t>
+            </a:r>
+          </a:p>
+          <a:p>
+            <a:pPr lvl="0" indent="0" marL="1270000">
+              <a:buNone/>
+            </a:pPr>
+            <a:r>
+              <a:rPr sz="2000" b="1"/>
+              <a:t>✅ Key idea</a:t>
+            </a:r>
+          </a:p>
+          <a:p>
+            <a:pPr lvl="0" indent="0" marL="1270000">
+              <a:buNone/>
+            </a:pPr>
+            <a:r>
+              <a:rPr sz="2000"/>
+              <a:t>Every working scientist googles error messages daily. Getting stuck is not failing — it is the job.</a:t>
             </a:r>
           </a:p>
         </p:txBody>

--- a/docs/content/two_way_anova/two_way_anova_lecture.pptx
+++ b/docs/content/two_way_anova/two_way_anova_lecture.pptx
@@ -56,7 +56,6 @@
     <p:sldId id="304" r:id="rId50"/>
     <p:sldId id="305" r:id="rId51"/>
     <p:sldId id="306" r:id="rId52"/>
-    <p:sldId id="307" r:id="rId53"/>
   </p:sldIdLst>
   <p:sldSz cx="9144000" cy="5143500" type="screen16x9"/>
   <p:notesSz cx="6858000" cy="9144000"/>
@@ -12056,224 +12055,6 @@
             <a:r>
               <a:rPr sz="2000"/>
               <a:t>Subsamples, and the right error term to test against</a:t>
-            </a:r>
-          </a:p>
-        </p:txBody>
-      </p:sp>
-    </p:spTree>
-  </p:cSld>
-</p:sld>
-</file>
-
-<file path=ppt/slides/slide52.xml><?xml version="1.0" encoding="utf-8"?>
-<p:sld xmlns:a="http://schemas.openxmlformats.org/drawingml/2006/main" xmlns:r="http://schemas.openxmlformats.org/officeDocument/2006/relationships" xmlns:p="http://schemas.openxmlformats.org/presentationml/2006/main">
-  <p:cSld>
-    <p:spTree>
-      <p:nvGrpSpPr>
-        <p:cNvPr id="1" name=""/>
-        <p:cNvGrpSpPr/>
-        <p:nvPr/>
-      </p:nvGrpSpPr>
-      <p:grpSpPr>
-        <a:xfrm>
-          <a:off x="0" y="0"/>
-          <a:ext cx="0" cy="0"/>
-          <a:chOff x="0" y="0"/>
-          <a:chExt cx="0" cy="0"/>
-        </a:xfrm>
-      </p:grpSpPr>
-      <p:sp>
-        <p:nvSpPr>
-          <p:cNvPr id="2" name="Title 1"/>
-          <p:cNvSpPr>
-            <a:spLocks noGrp="1"/>
-          </p:cNvSpPr>
-          <p:nvPr>
-            <p:ph type="title"/>
-          </p:nvPr>
-        </p:nvSpPr>
-        <p:spPr>
-          <a:xfrm>
-            <a:off x="0" y="0"/>
-            <a:ext cx="9144000" cy="582780"/>
-          </a:xfrm>
-        </p:spPr>
-        <p:txBody>
-          <a:bodyPr/>
-          <a:lstStyle/>
-          <a:p>
-            <a:pPr lvl="0" indent="0" marL="0">
-              <a:buNone/>
-            </a:pPr>
-            <a:r>
-              <a:rPr/>
-              <a:t>Getting unstuck</a:t>
-            </a:r>
-          </a:p>
-        </p:txBody>
-      </p:sp>
-      <p:sp>
-        <p:nvSpPr>
-          <p:cNvPr id="3" name="Content Placeholder 2"/>
-          <p:cNvSpPr>
-            <a:spLocks noGrp="1"/>
-          </p:cNvSpPr>
-          <p:nvPr>
-            <p:ph idx="1"/>
-          </p:nvPr>
-        </p:nvSpPr>
-        <p:spPr/>
-        <p:txBody>
-          <a:bodyPr/>
-          <a:lstStyle/>
-          <a:p>
-            <a:pPr lvl="0" indent="0" marL="0">
-              <a:buNone/>
-            </a:pPr>
-            <a:r>
-              <a:rPr/>
-              <a:t>When code breaks — and it will, that is normal:</a:t>
-            </a:r>
-          </a:p>
-          <a:p>
-            <a:pPr lvl="0" indent="-342900" marL="342900">
-              <a:buAutoNum type="arabicPeriod"/>
-            </a:pPr>
-            <a:r>
-              <a:rPr/>
-              <a:t>Read the </a:t>
-            </a:r>
-            <a:r>
-              <a:rPr b="1"/>
-              <a:t>error message</a:t>
-            </a:r>
-            <a:r>
-              <a:rPr/>
-              <a:t> out loud; it usually names the line</a:t>
-            </a:r>
-          </a:p>
-          <a:p>
-            <a:pPr lvl="0" indent="-342900" marL="342900">
-              <a:buAutoNum type="arabicPeriod"/>
-            </a:pPr>
-            <a:r>
-              <a:rPr/>
-              <a:t>Check the usual suspects: did you run </a:t>
-            </a:r>
-            <a:r>
-              <a:rPr>
-                <a:latin typeface="Courier"/>
-              </a:rPr>
-              <a:t>options(contrasts = c("contr.sum", "contr.poly"))</a:t>
-            </a:r>
-            <a:r>
-              <a:rPr/>
-              <a:t> </a:t>
-            </a:r>
-            <a:r>
-              <a:rPr b="1"/>
-              <a:t>before</a:t>
-            </a:r>
-            <a:r>
-              <a:rPr/>
-              <a:t> fitting the model you pass to </a:t>
-            </a:r>
-            <a:r>
-              <a:rPr>
-                <a:latin typeface="Courier"/>
-              </a:rPr>
-              <a:t>Anova(type = "III")</a:t>
-            </a:r>
-            <a:r>
-              <a:rPr/>
-              <a:t>? Are both predictors </a:t>
-            </a:r>
-            <a:r>
-              <a:rPr b="1"/>
-              <a:t>factors</a:t>
-            </a:r>
-            <a:r>
-              <a:rPr/>
-              <a:t>? Is it </a:t>
-            </a:r>
-            <a:r>
-              <a:rPr>
-                <a:latin typeface="Courier"/>
-              </a:rPr>
-              <a:t>car::Anova()</a:t>
-            </a:r>
-            <a:r>
-              <a:rPr/>
-              <a:t> (capital A, Type II/III) rather than </a:t>
-            </a:r>
-            <a:r>
-              <a:rPr>
-                <a:latin typeface="Courier"/>
-              </a:rPr>
-              <a:t>anova()</a:t>
-            </a:r>
-            <a:r>
-              <a:rPr/>
-              <a:t> (lower case, Type I)?</a:t>
-            </a:r>
-          </a:p>
-          <a:p>
-            <a:pPr lvl="0" indent="-342900" marL="342900">
-              <a:buAutoNum type="arabicPeriod"/>
-            </a:pPr>
-            <a:r>
-              <a:rPr>
-                <a:latin typeface="Courier"/>
-              </a:rPr>
-              <a:t>?function_name</a:t>
-            </a:r>
-            <a:r>
-              <a:rPr/>
-              <a:t> opens the help page</a:t>
-            </a:r>
-          </a:p>
-          <a:p>
-            <a:pPr lvl="0" indent="-342900" marL="342900">
-              <a:buAutoNum type="arabicPeriod"/>
-            </a:pPr>
-            <a:r>
-              <a:rPr/>
-              <a:t>Bring the </a:t>
-            </a:r>
-            <a:r>
-              <a:rPr b="1"/>
-              <a:t>exact error</a:t>
-            </a:r>
-            <a:r>
-              <a:rPr/>
-              <a:t> (copy-paste it) to class or office hours</a:t>
-            </a:r>
-          </a:p>
-          <a:p>
-            <a:pPr lvl="0" indent="0" marL="1270000">
-              <a:buNone/>
-            </a:pPr>
-            <a:r>
-              <a:rPr sz="2000" b="1"/>
-              <a:t>Note</a:t>
-            </a:r>
-          </a:p>
-          <a:p>
-            <a:pPr lvl="0" indent="0" marL="1270000">
-              <a:buNone/>
-            </a:pPr>
-            <a:r>
-              <a:rPr sz="2000" b="1"/>
-              <a:t>✅ Key idea</a:t>
-            </a:r>
-          </a:p>
-          <a:p>
-            <a:pPr lvl="0" indent="0" marL="1270000">
-              <a:buNone/>
-            </a:pPr>
-            <a:r>
-              <a:rPr sz="2000"/>
-              <a:t>Every working scientist googles error messages daily. Getting stuck is not failing — it is the job.</a:t>
             </a:r>
           </a:p>
         </p:txBody>
